--- a/metro/metro-x03-open-house-flyer.pptx
+++ b/metro/metro-x03-open-house-flyer.pptx
@@ -3329,9 +3329,9 @@
                 <a:solidFill>
                   <a:srgbClr val="14161A"/>
                 </a:solidFill>
-                <a:latin typeface="Space Grotesk"/>
-                <a:ea typeface="Space Grotesk"/>
-                <a:cs typeface="Space Grotesk"/>
+                <a:latin typeface="HK Grotesk"/>
+                <a:ea typeface="HK Grotesk"/>
+                <a:cs typeface="HK Grotesk"/>
               </a:rPr>
               <a:t>1200 N Wells, 14C</a:t>
             </a:r>
@@ -3364,9 +3364,9 @@
                 <a:solidFill>
                   <a:srgbClr val="8A8F99"/>
                 </a:solidFill>
-                <a:latin typeface="Space Grotesk"/>
-                <a:ea typeface="Space Grotesk"/>
-                <a:cs typeface="Space Grotesk"/>
+                <a:latin typeface="HK Grotesk"/>
+                <a:ea typeface="HK Grotesk"/>
+                <a:cs typeface="HK Grotesk"/>
               </a:rPr>
               <a:t>River North, Chicago</a:t>
             </a:r>
@@ -3434,9 +3434,9 @@
                 <a:solidFill>
                   <a:srgbClr val="14161A"/>
                 </a:solidFill>
-                <a:latin typeface="Space Grotesk"/>
-                <a:ea typeface="Space Grotesk"/>
-                <a:cs typeface="Space Grotesk"/>
+                <a:latin typeface="HK Grotesk"/>
+                <a:ea typeface="HK Grotesk"/>
+                <a:cs typeface="HK Grotesk"/>
               </a:rPr>
               <a:t>Sun · June 13</a:t>
             </a:r>
@@ -3504,9 +3504,9 @@
                 <a:solidFill>
                   <a:srgbClr val="14161A"/>
                 </a:solidFill>
-                <a:latin typeface="Space Grotesk"/>
-                <a:ea typeface="Space Grotesk"/>
-                <a:cs typeface="Space Grotesk"/>
+                <a:latin typeface="HK Grotesk"/>
+                <a:ea typeface="HK Grotesk"/>
+                <a:cs typeface="HK Grotesk"/>
               </a:rPr>
               <a:t>12—3 PM</a:t>
             </a:r>
@@ -3574,9 +3574,9 @@
                 <a:solidFill>
                   <a:srgbClr val="2D5BE3"/>
                 </a:solidFill>
-                <a:latin typeface="Space Grotesk"/>
-                <a:ea typeface="Space Grotesk"/>
-                <a:cs typeface="Space Grotesk"/>
+                <a:latin typeface="HK Grotesk"/>
+                <a:ea typeface="HK Grotesk"/>
+                <a:cs typeface="HK Grotesk"/>
               </a:rPr>
               <a:t>$895,000</a:t>
             </a:r>
@@ -3644,9 +3644,9 @@
                 <a:solidFill>
                   <a:srgbClr val="14161A"/>
                 </a:solidFill>
-                <a:latin typeface="Space Grotesk"/>
-                <a:ea typeface="Space Grotesk"/>
-                <a:cs typeface="Space Grotesk"/>
+                <a:latin typeface="HK Grotesk"/>
+                <a:ea typeface="HK Grotesk"/>
+                <a:cs typeface="HK Grotesk"/>
               </a:rPr>
               <a:t>2 BD · 2 BA · 1,480 SF</a:t>
             </a:r>
@@ -3683,9 +3683,9 @@
                 <a:solidFill>
                   <a:srgbClr val="24272E"/>
                 </a:solidFill>
-                <a:latin typeface="Space Grotesk"/>
-                <a:ea typeface="Space Grotesk"/>
-                <a:cs typeface="Space Grotesk"/>
+                <a:latin typeface="HK Grotesk"/>
+                <a:ea typeface="HK Grotesk"/>
+                <a:cs typeface="HK Grotesk"/>
               </a:rPr>
               <a:t>A light-filled corner residence above the city. Chef’s kitchen, private balcony, floor-to-ceiling glass onto the skyline. Heated parking, storage, and a doorman who knows your name.</a:t>
             </a:r>
@@ -3722,9 +3722,9 @@
                 <a:solidFill>
                   <a:srgbClr val="14161A"/>
                 </a:solidFill>
-                <a:latin typeface="Space Grotesk"/>
-                <a:ea typeface="Space Grotesk"/>
-                <a:cs typeface="Space Grotesk"/>
+                <a:latin typeface="HK Grotesk"/>
+                <a:ea typeface="HK Grotesk"/>
+                <a:cs typeface="HK Grotesk"/>
               </a:rPr>
               <a:t>Julian Reyes</a:t>
             </a:r>
